--- a/智服方舟-初赛提交材料/智服方舟-初赛方案.pptx
+++ b/智服方舟-初赛提交材料/智服方舟-初赛方案.pptx
@@ -22119,16 +22119,6 @@
               <a:t> </a:t>
             </a:r>
             <a:r>
-              <a:rPr lang="zh-CN" altLang="en-US" sz="1000" b="0" i="0">
-                <a:solidFill>
-                  <a:srgbClr val="9AABBE"/>
-                </a:solidFill>
-                <a:latin typeface="微软雅黑" panose="020B0503020204020204" charset="-122"/>
-                <a:ea typeface="微软雅黑" panose="020B0503020204020204" charset="-122"/>
-              </a:rPr>
-              <a:t>王子寒</a:t>
-            </a:r>
-            <a:r>
               <a:rPr sz="1000" b="0" i="0">
                 <a:solidFill>
                   <a:srgbClr val="9AABBE"/>
